--- a/public/fun/pack/pptx/birthdaypro/돌잔치프리미엄_02_돌잡이중심_블러시샴페인.pptx
+++ b/public/fun/pack/pptx/birthdaypro/돌잔치프리미엄_02_돌잡이중심_블러시샴페인.pptx
@@ -112,12 +112,12 @@
   <p:extLst>
     <p:ext uri="{521415D9-36F7-43E2-AB2F-B90AF26B5E84}">
       <p14:sectionLst xmlns:p14="http://schemas.microsoft.com/office/powerpoint/2010/main">
-        <p14:section name="시작" id="{E148CC5F-6077-4A16-8204-0585FFBA420B}">
+        <p14:section name="시작" id="{6C9E6857-7559-4873-BCE6-93C045FEB9DD}">
           <p14:sldIdLst>
             <p14:sldId id="256"/>
           </p14:sldIdLst>
         </p14:section>
-        <p14:section name="본문" id="{C2391C51-6F46-4894-B1A3-3891F750CBA0}">
+        <p14:section name="본문" id="{DF3DE71E-26C8-4866-94C7-71B54100F67E}">
           <p14:sldIdLst>
             <p14:sldId id="257"/>
             <p14:sldId id="258"/>
@@ -125,7 +125,7 @@
             <p14:sldId id="260"/>
           </p14:sldIdLst>
         </p14:section>
-        <p14:section name="마무리" id="{BA4AC258-0C93-41A6-BF35-0D012799B800}">
+        <p14:section name="마무리" id="{DF6B6B17-C1AF-4CBE-AADC-D6FB973E2E0F}">
           <p14:sldIdLst>
             <p14:sldId id="261"/>
           </p14:sldIdLst>
@@ -1405,7 +1405,7 @@
             </a:lvl1pPr>
           </a:lstStyle>
           <a:p>
-            <a:fld id="{16CF0522-67F9-4E38-966D-9A382A50AE1D}" type="slidenum">
+            <a:fld id="{23DB148E-66D7-431E-B1E8-F9338085C8BB}" type="slidenum">
               <a:rPr lang="en-US"/>
               <a:t>‹#›</a:t>
             </a:fld>
@@ -2062,7 +2062,7 @@
             </a:lvl1pPr>
           </a:lstStyle>
           <a:p>
-            <a:fld id="{9A044564-8B59-4EC1-94E9-DAE5DEF8547D}" type="slidenum">
+            <a:fld id="{7BE9667B-4D1A-4E98-9EF7-99EC5A73FDE6}" type="slidenum">
               <a:rPr lang="en-US"/>
               <a:t>‹#›</a:t>
             </a:fld>
@@ -2753,7 +2753,7 @@
             </a:lvl1pPr>
           </a:lstStyle>
           <a:p>
-            <a:fld id="{CBDD9EE5-0500-4CB0-BE89-9DFBDB06C330}" type="slidenum">
+            <a:fld id="{59DC1388-F037-489E-A6A8-C7683F78EBE9}" type="slidenum">
               <a:rPr lang="en-US"/>
               <a:t>‹#›</a:t>
             </a:fld>
@@ -3686,7 +3686,7 @@
           <a:p>
             <a:r>
               <a:rPr lang="ko-KR"/>
-              <a:t>아기 이름 · 0000. 00. 00</a:t>
+              <a:t>아기 이름 · 날짜 입력</a:t>
             </a:r>
           </a:p>
           <a:p>
@@ -3847,7 +3847,7 @@
           <a:bodyPr/>
           <a:lstStyle/>
           <a:p>
-            <a:fld id="{CA53C8B0-2BB8-4A0D-96EC-70B01E6CB090}" type="slidenum">
+            <a:fld id="{13617A53-C781-4046-925C-CE23DC9776DD}" type="slidenum">
               <a:rPr lang="en-US"/>
               <a:t>‹#›</a:t>
             </a:fld>
@@ -4447,7 +4447,7 @@
           <a:bodyPr/>
           <a:lstStyle/>
           <a:p>
-            <a:fld id="{EEF95641-092D-4996-95FE-6E458F26F3FB}" type="slidenum">
+            <a:fld id="{FB0CDD70-3866-4E31-9744-1E446BF8740E}" type="slidenum">
               <a:rPr lang="en-US"/>
               <a:t>‹#›</a:t>
             </a:fld>
@@ -5695,7 +5695,7 @@
           <a:bodyPr/>
           <a:lstStyle/>
           <a:p>
-            <a:fld id="{D1A9761D-F527-4883-811F-C647DE7D8D1E}" type="slidenum">
+            <a:fld id="{81E369C4-EEC1-42CB-AA8A-7F0C109ACB99}" type="slidenum">
               <a:rPr lang="en-US"/>
               <a:t>‹#›</a:t>
             </a:fld>
@@ -6470,7 +6470,7 @@
           <a:bodyPr/>
           <a:lstStyle/>
           <a:p>
-            <a:fld id="{FB00B71E-FFF9-4F9C-A177-EA29BEFFB183}" type="slidenum">
+            <a:fld id="{8B5EFA09-7604-4771-A39B-2D75A3D943EB}" type="slidenum">
               <a:rPr lang="en-US"/>
               <a:t>‹#›</a:t>
             </a:fld>
